--- a/18차시_DirtyFlag/강의자료/유니티 프로그래밍 패턴 18차시 - DirtyFlag.pptx
+++ b/18차시_DirtyFlag/강의자료/유니티 프로그래밍 패턴 18차시 - DirtyFlag.pptx
@@ -518,8 +518,7 @@
           <a:p>
             <a:r>
               <a:rPr lang="en-US" dirty="0"/>
-              <a:t>Source: Robert Nystrom, Game Programming Patterns, DirtyFlag. https://gameprogrammingpatterns.com/dirty-flag.html
-Cover slide.</a:t>
+              <a:t>Cover slide.</a:t>
             </a:r>
             <a:endParaRPr lang="en-US" dirty="0"/>
           </a:p>
@@ -607,8 +606,7 @@
           <a:p>
             <a:r>
               <a:rPr lang="en-US" dirty="0"/>
-              <a:t>Source: Robert Nystrom, Game Programming Patterns, DirtyFlag. https://gameprogrammingpatterns.com/dirty-flag.html
-Representative C# code fragment.</a:t>
+              <a:t>Representative C# code fragment.</a:t>
             </a:r>
             <a:endParaRPr lang="en-US" dirty="0"/>
           </a:p>
@@ -696,8 +694,7 @@
           <a:p>
             <a:r>
               <a:rPr lang="en-US" dirty="0"/>
-              <a:t>Source: Robert Nystrom, Game Programming Patterns, DirtyFlag. https://gameprogrammingpatterns.com/dirty-flag.html
-Unity에서 보는 위치: Transform 계층, 경로 비용, UI 레이아웃 재계산에서 흔히 보이는 방식이다. 실습 장면은 Play 버튼만 눌러도 큰 HUD로 현재 상태를 볼 수 있게 만든다. 학생은 HUD 변화를 보며 TODO 구현이 맞는지 확인한다.</a:t>
+              <a:t>Unity에서 보는 위치: Transform 계층, 경로 비용, UI 레이아웃 재계산에서 흔히 보이는 방식이다. 실습 장면은 Play 버튼만 눌러도 큰 HUD로 현재 상태를 볼 수 있게 만든다. 학생은 HUD 변화를 보며 TODO 구현이 맞는지 확인한다.</a:t>
             </a:r>
             <a:endParaRPr lang="en-US" dirty="0"/>
           </a:p>
@@ -785,8 +782,7 @@
           <a:p>
             <a:r>
               <a:rPr lang="en-US" dirty="0"/>
-              <a:t>Source: Robert Nystrom, Game Programming Patterns, DirtyFlag. https://gameprogrammingpatterns.com/dirty-flag.html
-장점: 역할이 나뉘어 기능 추가 위치가 선명해진다. 수정 범위가 줄고, 테스트할 단위가 작아진다. 반복되는 설계 문제를 팀에서 같은 이름으로 토론할 수 있다.</a:t>
+              <a:t>장점: 역할이 나뉘어 기능 추가 위치가 선명해진다. 수정 범위가 줄고, 테스트할 단위가 작아진다. 반복되는 설계 문제를 팀에서 같은 이름으로 토론할 수 있다.</a:t>
             </a:r>
             <a:endParaRPr lang="en-US" dirty="0"/>
           </a:p>
@@ -874,8 +870,7 @@
           <a:p>
             <a:r>
               <a:rPr lang="en-US" dirty="0"/>
-              <a:t>Source: Robert Nystrom, Game Programming Patterns, DirtyFlag. https://gameprogrammingpatterns.com/dirty-flag.html
-주의점: dirty 표시를 빼먹으면 오래된 값이 보이고, 너무 자주 표시하면 이득이 줄어든다. 패턴은 자동 정답이 아니라 비용과 이득을 비교해 선택하는 도구다. 작은 예제에 과하게 적용하면 오히려 코드가 길어진다.</a:t>
+              <a:t>주의점: dirty 표시를 빼먹으면 오래된 값이 보이고, 너무 자주 표시하면 이득이 줄어든다. 패턴은 자동 정답이 아니라 비용과 이득을 비교해 선택하는 도구다. 작은 예제에 과하게 적용하면 오히려 코드가 길어진다.</a:t>
             </a:r>
             <a:endParaRPr lang="en-US" dirty="0"/>
           </a:p>
@@ -963,8 +958,7 @@
           <a:p>
             <a:r>
               <a:rPr lang="en-US" dirty="0"/>
-              <a:t>Source: Robert Nystrom, Game Programming Patterns, DirtyFlag. https://gameprogrammingpatterns.com/dirty-flag.html
-Unity 실습 목표: 로컬 좌표가 바뀌면 worldPosition을 dirty로 표시하고 필요할 때 계산한다. 학생용 스크립트에는 핵심 구현이 TODO로 비워져 있다. 정답 코드는 프로젝트 루트의 `실습자료 정답` 폴더에 따로 둔다.</a:t>
+              <a:t>Unity 실습 목표: 로컬 좌표가 바뀌면 worldPosition을 dirty로 표시하고 필요할 때 계산한다. 학생용 스크립트에는 핵심 구현이 TODO로 비워져 있다. 정답 코드는 프로젝트 루트의 `실습자료 정답` 폴더에 따로 둔다.</a:t>
             </a:r>
             <a:endParaRPr lang="en-US" dirty="0"/>
           </a:p>
@@ -1052,8 +1046,7 @@
           <a:p>
             <a:r>
               <a:rPr lang="en-US" dirty="0"/>
-              <a:t>Source: Robert Nystrom, Game Programming Patterns, DirtyFlag. https://gameprogrammingpatterns.com/dirty-flag.html
-학생 TODO 목록: dirty 플래그 설정 캐시 값 반환 필요할 때 재계산 자식에게 전파 HUD 표시</a:t>
+              <a:t>학생 TODO 목록: dirty 플래그 설정 캐시 값 반환 필요할 때 재계산 자식에게 전파 HUD 표시</a:t>
             </a:r>
             <a:endParaRPr lang="en-US" dirty="0"/>
           </a:p>
@@ -1141,8 +1134,7 @@
           <a:p>
             <a:r>
               <a:rPr lang="en-US" dirty="0"/>
-              <a:t>Source: Robert Nystrom, Game Programming Patterns, DirtyFlag. https://gameprogrammingpatterns.com/dirty-flag.html
-통과 기준: 프로젝트가 컴파일되고 해당 차시 씬을 열 수 있다. Play 버튼을 누르면 큰 화면 UI에서 결과가 확인된다. TODO를 채운 뒤 패턴의 핵심 동작이 눈으로 확인된다.</a:t>
+              <a:t>통과 기준: 프로젝트가 컴파일되고 해당 차시 씬을 열 수 있다. Play 버튼을 누르면 큰 화면 UI에서 결과가 확인된다. TODO를 채운 뒤 패턴의 핵심 동작이 눈으로 확인된다.</a:t>
             </a:r>
             <a:endParaRPr lang="en-US" dirty="0"/>
           </a:p>
@@ -1230,8 +1222,7 @@
           <a:p>
             <a:r>
               <a:rPr lang="en-US" dirty="0"/>
-              <a:t>Source: Robert Nystrom, Game Programming Patterns, DirtyFlag. https://gameprogrammingpatterns.com/dirty-flag.html
-정리: 더티 플래그 패턴은 비싼 계산을 매번 하지 않고, 바뀐 경우에만 나중에 다시 계산한다. 패턴 이름보다 중요한 것은 책임 분리와 데이터 흐름을 설명할 수 있는 것이다. 다음 차시에서는 다른 설계 압력이 어떤 패턴으로 바뀌는지 비교한다.</a:t>
+              <a:t>정리: 더티 플래그 패턴은 비싼 계산을 매번 하지 않고, 바뀐 경우에만 나중에 다시 계산한다. 패턴 이름보다 중요한 것은 책임 분리와 데이터 흐름을 설명할 수 있는 것이다. 다음 차시에서는 다른 설계 압력이 어떤 패턴으로 바뀌는지 비교한다.</a:t>
             </a:r>
             <a:endParaRPr lang="en-US" dirty="0"/>
           </a:p>
@@ -1319,8 +1310,7 @@
           <a:p>
             <a:r>
               <a:rPr lang="en-US" dirty="0"/>
-              <a:t>Source: Robert Nystrom, Game Programming Patterns, DirtyFlag. https://gameprogrammingpatterns.com/dirty-flag.html
-오늘의 학습 목표: 패턴이 해결하려는 결합도나 성능 문제를 설명한다. DirtyFlag 패턴의 핵심 구조를 C# 코드로 읽는다. Unity 장면에서 패턴이 어떻게 보이는지 확인한다. 학생용 TODO 코드를 완성해 동작 기준을 통과한다.</a:t>
+              <a:t>오늘의 학습 목표: 패턴이 해결하려는 결합도나 성능 문제를 설명한다. DirtyFlag 패턴의 핵심 구조를 C# 코드로 읽는다. Unity 장면에서 패턴이 어떻게 보이는지 확인한다. 학생용 TODO 코드를 완성해 동작 기준을 통과한다.</a:t>
             </a:r>
             <a:endParaRPr lang="en-US" dirty="0"/>
           </a:p>
@@ -1408,8 +1398,7 @@
           <a:p>
             <a:r>
               <a:rPr lang="en-US" dirty="0"/>
-              <a:t>Source: Robert Nystrom, Game Programming Patterns, DirtyFlag. https://gameprogrammingpatterns.com/dirty-flag.html
-문제 상황: 부모가 움직일 때마다 모든 자식의 월드 좌표를 즉시 재계산하면 낭비가 생긴다. 처음에는 간단한 조건문이나 직접 참조로 해결할 수 있지만, 기능이 늘어나면 수정 범위가 커진다. 패턴은 이런 반복되는 설계 압력을 이름 붙이고 안전한 구조로 바꾼다.</a:t>
+              <a:t>문제 상황: 부모가 움직일 때마다 모든 자식의 월드 좌표를 즉시 재계산하면 낭비가 생긴다. 처음에는 간단한 조건문이나 직접 참조로 해결할 수 있지만, 기능이 늘어나면 수정 범위가 커진다. 패턴은 이런 반복되는 설계 압력을 이름 붙이고 안전한 구조로 바꾼다.</a:t>
             </a:r>
             <a:endParaRPr lang="en-US" dirty="0"/>
           </a:p>
@@ -1497,8 +1486,7 @@
           <a:p>
             <a:r>
               <a:rPr lang="en-US" dirty="0"/>
-              <a:t>Source: Robert Nystrom, Game Programming Patterns, DirtyFlag. https://gameprogrammingpatterns.com/dirty-flag.html
-원문 흐름 1: 월드 변환 재계산: 이 구간의 문제와 해결 방향을 수업 예제로 바꿔 본다. dirty 표시: 이 구간의 문제와 해결 방향을 수업 예제로 바꿔 본다. 지연 계산: 이 구간의 문제와 해결 방향을 수업 예제로 바꿔 본다.</a:t>
+              <a:t>예제 흐름 1: 월드 변환 재계산: 이 구간의 문제와 해결 방향을 수업 예제로 바꿔 본다. dirty 표시: 이 구간의 문제와 해결 방향을 수업 예제로 바꿔 본다. 지연 계산: 이 구간의 문제와 해결 방향을 수업 예제로 바꿔 본다.</a:t>
             </a:r>
             <a:endParaRPr lang="en-US" dirty="0"/>
           </a:p>
@@ -1586,8 +1574,7 @@
           <a:p>
             <a:r>
               <a:rPr lang="en-US" dirty="0"/>
-              <a:t>Source: Robert Nystrom, Game Programming Patterns, DirtyFlag. https://gameprogrammingpatterns.com/dirty-flag.html
-원문 흐름 2: 캐시 값: Unity/C# 관점에서 장점과 주의점을 연결한다. 주의점: Unity/C# 관점에서 장점과 주의점을 연결한다.</a:t>
+              <a:t>예제 흐름 2: 캐시 값: Unity/C# 관점에서 장점과 주의점을 연결한다. 주의점: Unity/C# 관점에서 장점과 주의점을 연결한다.</a:t>
             </a:r>
             <a:endParaRPr lang="en-US" dirty="0"/>
           </a:p>
@@ -1675,8 +1662,7 @@
           <a:p>
             <a:r>
               <a:rPr lang="en-US" dirty="0"/>
-              <a:t>Source: Robert Nystrom, Game Programming Patterns, DirtyFlag. https://gameprogrammingpatterns.com/dirty-flag.html
-한 문장 정의: Dirty Flag는 데이터가 변경되었음을 표시하고, 실제 값이 필요할 때 갱신한다. 중요한 것은 코드 모양을 외우는 것이 아니라, 어떤 의존성을 어디로 옮기는지 이해하는 것이다.</a:t>
+              <a:t>한 문장 정의: Dirty Flag는 데이터가 변경되었음을 표시하고, 실제 값이 필요할 때 갱신한다. 중요한 것은 코드 모양을 외우는 것이 아니라, 어떤 의존성을 어디로 옮기는지 이해하는 것이다.</a:t>
             </a:r>
             <a:endParaRPr lang="en-US" dirty="0"/>
           </a:p>
@@ -1764,8 +1750,7 @@
           <a:p>
             <a:r>
               <a:rPr lang="en-US" dirty="0"/>
-              <a:t>Source: Robert Nystrom, Game Programming Patterns, DirtyFlag. https://gameprogrammingpatterns.com/dirty-flag.html
-핵심 구성 요소: Dirty: DirtyFlag 패턴을 설명할 때 반복해서 등장하는 역할이다. Cached Value: DirtyFlag 패턴을 설명할 때 반복해서 등장하는 역할이다. Lazy Update: DirtyFlag 패턴을 설명할 때 반복해서 등장하는 역할이다. Invalidation: DirtyFlag 패턴을 설명할 때 반복해서 등장하는 역할이다. Recalculate: DirtyFlag 패턴을 설명할 때 반복해서 등장하는 역할이다.</a:t>
+              <a:t>핵심 구성 요소: Dirty: DirtyFlag 패턴을 설명할 때 반복해서 등장하는 역할이다. Cached Value: DirtyFlag 패턴을 설명할 때 반복해서 등장하는 역할이다. Lazy Update: DirtyFlag 패턴을 설명할 때 반복해서 등장하는 역할이다. Invalidation: DirtyFlag 패턴을 설명할 때 반복해서 등장하는 역할이다. Recalculate: DirtyFlag 패턴을 설명할 때 반복해서 등장하는 역할이다.</a:t>
             </a:r>
             <a:endParaRPr lang="en-US" dirty="0"/>
           </a:p>
@@ -1853,8 +1838,7 @@
           <a:p>
             <a:r>
               <a:rPr lang="en-US" dirty="0"/>
-              <a:t>Source: Robert Nystrom, Game Programming Patterns, DirtyFlag. https://gameprogrammingpatterns.com/dirty-flag.html
-나쁜 출발점: 모든 시스템이 서로를 직접 알고 호출한다. 작은 기능을 추가할 때 관련 없는 클래스까지 수정해야 한다. 테스트와 재사용이 어려워지고, 실행 순서 버그가 숨어든다.</a:t>
+              <a:t>나쁜 출발점: 모든 시스템이 서로를 직접 알고 호출한다. 작은 기능을 추가할 때 관련 없는 클래스까지 수정해야 한다. 테스트와 재사용이 어려워지고, 실행 순서 버그가 숨어든다.</a:t>
             </a:r>
             <a:endParaRPr lang="en-US" dirty="0"/>
           </a:p>
@@ -1942,8 +1926,7 @@
           <a:p>
             <a:r>
               <a:rPr lang="en-US" dirty="0"/>
-              <a:t>Source: Robert Nystrom, Game Programming Patterns, DirtyFlag. https://gameprogrammingpatterns.com/dirty-flag.html
-패턴을 적용한 구조: 비싼 계산을 매번 하지 않고, 바뀐 경우에만 나중에 다시 계산한다. 객체의 책임을 분리하고, 바뀌는 부분을 명확한 경계 뒤로 숨긴다. 그 결과 기능 추가 위치가 예측 가능해진다.</a:t>
+              <a:t>패턴을 적용한 구조: 비싼 계산을 매번 하지 않고, 바뀐 경우에만 나중에 다시 계산한다. 객체의 책임을 분리하고, 바뀌는 부분을 명확한 경계 뒤로 숨긴다. 그 결과 기능 추가 위치가 예측 가능해진다.</a:t>
             </a:r>
             <a:endParaRPr lang="en-US" dirty="0"/>
           </a:p>
@@ -2854,7 +2837,7 @@
                 <a:ea typeface="Malgun Gothic" pitchFamily="34" charset="-122"/>
                 <a:cs typeface="Malgun Gothic" pitchFamily="34" charset="-120"/>
               </a:rPr>
-              <a:t>Game Programming Patterns · Unity/C#</a:t>
+              <a:t>Unity/C# 설계 패턴</a:t>
             </a:r>
             <a:endParaRPr lang="en-US" sz="1050" dirty="0"/>
           </a:p>
@@ -3055,7 +3038,7 @@
                 <a:ea typeface="Malgun Gothic" pitchFamily="34" charset="-122"/>
                 <a:cs typeface="Malgun Gothic" pitchFamily="34" charset="-120"/>
               </a:rPr>
-              <a:t>Game Programming Patterns - DirtyFlag | Unity/C#</a:t>
+              <a:t>DirtyFlag | Unity/C#</a:t>
             </a:r>
             <a:endParaRPr lang="en-US" sz="700" dirty="0"/>
           </a:p>
@@ -3198,7 +3181,7 @@
                 <a:ea typeface="Consolas" pitchFamily="34" charset="-122"/>
                 <a:cs typeface="Consolas" pitchFamily="34" charset="-120"/>
               </a:rPr>
-              <a:t>    world = parent.World + local;</a:t>
+              <a:t>world = parent.World + local;</a:t>
             </a:r>
             <a:endParaRPr lang="en-US" sz="1300" dirty="0"/>
           </a:p>
@@ -3215,7 +3198,7 @@
                 <a:ea typeface="Consolas" pitchFamily="34" charset="-122"/>
                 <a:cs typeface="Consolas" pitchFamily="34" charset="-120"/>
               </a:rPr>
-              <a:t>    dirty = false;</a:t>
+              <a:t>dirty = false;</a:t>
             </a:r>
             <a:endParaRPr lang="en-US" sz="1300" dirty="0"/>
           </a:p>
@@ -3433,7 +3416,7 @@
                 <a:ea typeface="Malgun Gothic" pitchFamily="34" charset="-122"/>
                 <a:cs typeface="Malgun Gothic" pitchFamily="34" charset="-120"/>
               </a:rPr>
-              <a:t>Game Programming Patterns - DirtyFlag | Unity/C#</a:t>
+              <a:t>DirtyFlag | Unity/C#</a:t>
             </a:r>
             <a:endParaRPr lang="en-US" sz="700" dirty="0"/>
           </a:p>
@@ -3832,7 +3815,7 @@
                 <a:ea typeface="Malgun Gothic" pitchFamily="34" charset="-122"/>
                 <a:cs typeface="Malgun Gothic" pitchFamily="34" charset="-120"/>
               </a:rPr>
-              <a:t>Game Programming Patterns - DirtyFlag | Unity/C#</a:t>
+              <a:t>DirtyFlag | Unity/C#</a:t>
             </a:r>
             <a:endParaRPr lang="en-US" sz="700" dirty="0"/>
           </a:p>
@@ -4231,7 +4214,7 @@
                 <a:ea typeface="Malgun Gothic" pitchFamily="34" charset="-122"/>
                 <a:cs typeface="Malgun Gothic" pitchFamily="34" charset="-120"/>
               </a:rPr>
-              <a:t>Game Programming Patterns - DirtyFlag | Unity/C#</a:t>
+              <a:t>DirtyFlag | Unity/C#</a:t>
             </a:r>
             <a:endParaRPr lang="en-US" sz="700" dirty="0"/>
           </a:p>
@@ -4630,7 +4613,7 @@
                 <a:ea typeface="Malgun Gothic" pitchFamily="34" charset="-122"/>
                 <a:cs typeface="Malgun Gothic" pitchFamily="34" charset="-120"/>
               </a:rPr>
-              <a:t>Game Programming Patterns - DirtyFlag | Unity/C#</a:t>
+              <a:t>DirtyFlag | Unity/C#</a:t>
             </a:r>
             <a:endParaRPr lang="en-US" sz="700" dirty="0"/>
           </a:p>
@@ -5029,7 +5012,7 @@
                 <a:ea typeface="Malgun Gothic" pitchFamily="34" charset="-122"/>
                 <a:cs typeface="Malgun Gothic" pitchFamily="34" charset="-120"/>
               </a:rPr>
-              <a:t>Game Programming Patterns - DirtyFlag | Unity/C#</a:t>
+              <a:t>DirtyFlag | Unity/C#</a:t>
             </a:r>
             <a:endParaRPr lang="en-US" sz="700" dirty="0"/>
           </a:p>
@@ -5560,7 +5543,7 @@
                 <a:ea typeface="Malgun Gothic" pitchFamily="34" charset="-122"/>
                 <a:cs typeface="Malgun Gothic" pitchFamily="34" charset="-120"/>
               </a:rPr>
-              <a:t>Game Programming Patterns - DirtyFlag | Unity/C#</a:t>
+              <a:t>DirtyFlag | Unity/C#</a:t>
             </a:r>
             <a:endParaRPr lang="en-US" sz="700" dirty="0"/>
           </a:p>
@@ -5959,7 +5942,7 @@
                 <a:ea typeface="Malgun Gothic" pitchFamily="34" charset="-122"/>
                 <a:cs typeface="Malgun Gothic" pitchFamily="34" charset="-120"/>
               </a:rPr>
-              <a:t>Game Programming Patterns - DirtyFlag | Unity/C#</a:t>
+              <a:t>DirtyFlag | Unity/C#</a:t>
             </a:r>
             <a:endParaRPr lang="en-US" sz="700" dirty="0"/>
           </a:p>
@@ -6358,7 +6341,7 @@
                 <a:ea typeface="Malgun Gothic" pitchFamily="34" charset="-122"/>
                 <a:cs typeface="Malgun Gothic" pitchFamily="34" charset="-120"/>
               </a:rPr>
-              <a:t>Game Programming Patterns - DirtyFlag | Unity/C#</a:t>
+              <a:t>DirtyFlag | Unity/C#</a:t>
             </a:r>
             <a:endParaRPr lang="en-US" sz="700" dirty="0"/>
           </a:p>
@@ -6823,7 +6806,7 @@
                 <a:ea typeface="Malgun Gothic" pitchFamily="34" charset="-122"/>
                 <a:cs typeface="Malgun Gothic" pitchFamily="34" charset="-120"/>
               </a:rPr>
-              <a:t>Game Programming Patterns - DirtyFlag | Unity/C#</a:t>
+              <a:t>DirtyFlag | Unity/C#</a:t>
             </a:r>
             <a:endParaRPr lang="en-US" sz="700" dirty="0"/>
           </a:p>
@@ -7144,7 +7127,7 @@
                 <a:ea typeface="Malgun Gothic" pitchFamily="34" charset="-122"/>
                 <a:cs typeface="Malgun Gothic" pitchFamily="34" charset="-120"/>
               </a:rPr>
-              <a:t>원문 흐름 1</a:t>
+              <a:t>예제 흐름 1</a:t>
             </a:r>
             <a:endParaRPr lang="en-US" sz="2400" dirty="0"/>
           </a:p>
@@ -7222,7 +7205,7 @@
                 <a:ea typeface="Malgun Gothic" pitchFamily="34" charset="-122"/>
                 <a:cs typeface="Malgun Gothic" pitchFamily="34" charset="-120"/>
               </a:rPr>
-              <a:t>Game Programming Patterns - DirtyFlag | Unity/C#</a:t>
+              <a:t>DirtyFlag | Unity/C#</a:t>
             </a:r>
             <a:endParaRPr lang="en-US" sz="700" dirty="0"/>
           </a:p>
@@ -7543,7 +7526,7 @@
                 <a:ea typeface="Malgun Gothic" pitchFamily="34" charset="-122"/>
                 <a:cs typeface="Malgun Gothic" pitchFamily="34" charset="-120"/>
               </a:rPr>
-              <a:t>원문 흐름 2</a:t>
+              <a:t>예제 흐름 2</a:t>
             </a:r>
             <a:endParaRPr lang="en-US" sz="2400" dirty="0"/>
           </a:p>
@@ -7621,7 +7604,7 @@
                 <a:ea typeface="Malgun Gothic" pitchFamily="34" charset="-122"/>
                 <a:cs typeface="Malgun Gothic" pitchFamily="34" charset="-120"/>
               </a:rPr>
-              <a:t>Game Programming Patterns - DirtyFlag | Unity/C#</a:t>
+              <a:t>DirtyFlag | Unity/C#</a:t>
             </a:r>
             <a:endParaRPr lang="en-US" sz="700" dirty="0"/>
           </a:p>
@@ -7954,7 +7937,7 @@
                 <a:ea typeface="Malgun Gothic" pitchFamily="34" charset="-122"/>
                 <a:cs typeface="Malgun Gothic" pitchFamily="34" charset="-120"/>
               </a:rPr>
-              <a:t>Game Programming Patterns - DirtyFlag | Unity/C#</a:t>
+              <a:t>DirtyFlag | Unity/C#</a:t>
             </a:r>
             <a:endParaRPr lang="en-US" sz="700" dirty="0"/>
           </a:p>
@@ -8287,7 +8270,7 @@
                 <a:ea typeface="Malgun Gothic" pitchFamily="34" charset="-122"/>
                 <a:cs typeface="Malgun Gothic" pitchFamily="34" charset="-120"/>
               </a:rPr>
-              <a:t>Game Programming Patterns - DirtyFlag | Unity/C#</a:t>
+              <a:t>DirtyFlag | Unity/C#</a:t>
             </a:r>
             <a:endParaRPr lang="en-US" sz="700" dirty="0"/>
           </a:p>
@@ -8818,7 +8801,7 @@
                 <a:ea typeface="Malgun Gothic" pitchFamily="34" charset="-122"/>
                 <a:cs typeface="Malgun Gothic" pitchFamily="34" charset="-120"/>
               </a:rPr>
-              <a:t>Game Programming Patterns - DirtyFlag | Unity/C#</a:t>
+              <a:t>DirtyFlag | Unity/C#</a:t>
             </a:r>
             <a:endParaRPr lang="en-US" sz="700" dirty="0"/>
           </a:p>
@@ -9217,7 +9200,7 @@
                 <a:ea typeface="Malgun Gothic" pitchFamily="34" charset="-122"/>
                 <a:cs typeface="Malgun Gothic" pitchFamily="34" charset="-120"/>
               </a:rPr>
-              <a:t>Game Programming Patterns - DirtyFlag | Unity/C#</a:t>
+              <a:t>DirtyFlag | Unity/C#</a:t>
             </a:r>
             <a:endParaRPr lang="en-US" sz="700" dirty="0"/>
           </a:p>
